--- a/docs/submission/FloodFact-AI-Concept.pptx
+++ b/docs/submission/FloodFact-AI-Concept.pptx
@@ -2933,8 +2933,8 @@
         </p:nvSpPr>
         <p:spPr>
           <a:xfrm>
-            <a:off x="3064492" y="1728216"/>
-            <a:ext cx="6059969" cy="4270248"/>
+            <a:off x="3286010" y="1728216"/>
+            <a:ext cx="5616931" cy="4270248"/>
           </a:xfrm>
           <a:prstGeom prst="roundRect">
             <a:avLst>
@@ -2968,8 +2968,8 @@
         </p:blipFill>
         <p:spPr>
           <a:xfrm>
-            <a:off x="3119356" y="1783080"/>
-            <a:ext cx="5950241" cy="4160520"/>
+            <a:off x="3340874" y="1783080"/>
+            <a:ext cx="5507203" cy="4160520"/>
           </a:xfrm>
           <a:prstGeom prst="rect">
             <a:avLst/>

--- a/docs/submission/FloodFact-AI-Concept.pptx
+++ b/docs/submission/FloodFact-AI-Concept.pptx
@@ -2933,8 +2933,8 @@
         </p:nvSpPr>
         <p:spPr>
           <a:xfrm>
-            <a:off x="3286010" y="1728216"/>
-            <a:ext cx="5616931" cy="4270248"/>
+            <a:off x="3268818" y="1728216"/>
+            <a:ext cx="5651316" cy="4270248"/>
           </a:xfrm>
           <a:prstGeom prst="roundRect">
             <a:avLst>
@@ -2968,8 +2968,8 @@
         </p:blipFill>
         <p:spPr>
           <a:xfrm>
-            <a:off x="3340874" y="1783080"/>
-            <a:ext cx="5507203" cy="4160520"/>
+            <a:off x="3323682" y="1783080"/>
+            <a:ext cx="5541588" cy="4160520"/>
           </a:xfrm>
           <a:prstGeom prst="rect">
             <a:avLst/>

--- a/docs/submission/FloodFact-AI-Concept.pptx
+++ b/docs/submission/FloodFact-AI-Concept.pptx
@@ -2933,8 +2933,8 @@
         </p:nvSpPr>
         <p:spPr>
           <a:xfrm>
-            <a:off x="3268818" y="1728216"/>
-            <a:ext cx="5651316" cy="4270248"/>
+            <a:off x="3714081" y="1728216"/>
+            <a:ext cx="4760790" cy="4270248"/>
           </a:xfrm>
           <a:prstGeom prst="roundRect">
             <a:avLst>
@@ -2968,8 +2968,8 @@
         </p:blipFill>
         <p:spPr>
           <a:xfrm>
-            <a:off x="3323682" y="1783080"/>
-            <a:ext cx="5541588" cy="4160520"/>
+            <a:off x="3768945" y="1783080"/>
+            <a:ext cx="4651062" cy="4160520"/>
           </a:xfrm>
           <a:prstGeom prst="rect">
             <a:avLst/>

--- a/docs/submission/FloodFact-AI-Concept.pptx
+++ b/docs/submission/FloodFact-AI-Concept.pptx
@@ -2531,6 +2531,40 @@
           </a:p>
         </p:txBody>
       </p:sp>
+      <p:sp>
+        <p:nvSpPr>
+          <p:cNvPr id="5" name="TextBox 4"/>
+          <p:cNvSpPr txBox="1"/>
+          <p:nvPr/>
+        </p:nvSpPr>
+        <p:spPr>
+          <a:xfrm>
+            <a:off x="822960" y="4892040"/>
+            <a:ext cx="10332720" cy="365760"/>
+          </a:xfrm>
+          <a:prstGeom prst="rect">
+            <a:avLst/>
+          </a:prstGeom>
+          <a:noFill/>
+        </p:spPr>
+        <p:txBody>
+          <a:bodyPr wrap="square">
+            <a:spAutoFit/>
+          </a:bodyPr>
+          <a:lstStyle/>
+          <a:p>
+            <a:r>
+              <a:rPr sz="1300" b="0">
+                <a:solidFill>
+                  <a:srgbClr val="9FB3B6"/>
+                </a:solidFill>
+                <a:latin typeface="Calibri"/>
+              </a:rPr>
+              <a:t>Team: Samuel Mburu Kairu · Vincent Odundo · Alvin Nyota · Amani Maria — Nairobi, Kenya</a:t>
+            </a:r>
+          </a:p>
+        </p:txBody>
+      </p:sp>
     </p:spTree>
   </p:cSld>
   <p:clrMapOvr>
@@ -3874,7 +3908,7 @@
                           <a:ea typeface="Calibri" pitchFamily="34" charset="-122"/>
                           <a:cs typeface="Calibri" pitchFamily="34" charset="-120"/>
                         </a:rPr>
-                        <a:t>Live-ready, sandbox fallback</a:t>
+                        <a:t>Live — WRI Aqueduct flood-risk atlas</a:t>
                       </a:r>
                       <a:endParaRPr lang="en-US" sz="1200" dirty="0">
                         <a:latin typeface="Calibri" charset="0"/>
@@ -4492,7 +4526,7 @@
                           <a:ea typeface="Calibri" pitchFamily="34" charset="-122"/>
                           <a:cs typeface="Calibri" pitchFamily="34" charset="-120"/>
                         </a:rPr>
-                        <a:t>Live-ready, sandbox fallback</a:t>
+                        <a:t>Live — sandbox account verified</a:t>
                       </a:r>
                       <a:endParaRPr lang="en-US" sz="1200" dirty="0">
                         <a:latin typeface="Calibri" charset="0"/>
@@ -4698,7 +4732,7 @@
                           <a:ea typeface="Calibri" pitchFamily="34" charset="-122"/>
                           <a:cs typeface="Calibri" pitchFamily="34" charset="-120"/>
                         </a:rPr>
-                        <a:t>Live-ready, sandbox fallback</a:t>
+                        <a:t>Live — verified</a:t>
                       </a:r>
                       <a:endParaRPr lang="en-US" sz="1200" dirty="0">
                         <a:latin typeface="Calibri" charset="0"/>
@@ -4904,7 +4938,7 @@
                           <a:ea typeface="Calibri" pitchFamily="34" charset="-122"/>
                           <a:cs typeface="Calibri" pitchFamily="34" charset="-120"/>
                         </a:rPr>
-                        <a:t>Live-ready, lexical fallback</a:t>
+                        <a:t>Live — verified</a:t>
                       </a:r>
                       <a:endParaRPr lang="en-US" sz="1200" dirty="0">
                         <a:latin typeface="Calibri" charset="0"/>
@@ -9523,6 +9557,40 @@
               <a:t>17</a:t>
             </a:r>
             <a:endParaRPr lang="en-US" sz="900" dirty="0"/>
+          </a:p>
+        </p:txBody>
+      </p:sp>
+      <p:sp>
+        <p:nvSpPr>
+          <p:cNvPr id="7" name="TextBox 6"/>
+          <p:cNvSpPr txBox="1"/>
+          <p:nvPr/>
+        </p:nvSpPr>
+        <p:spPr>
+          <a:xfrm>
+            <a:off x="822960" y="4892040"/>
+            <a:ext cx="10332720" cy="365760"/>
+          </a:xfrm>
+          <a:prstGeom prst="rect">
+            <a:avLst/>
+          </a:prstGeom>
+          <a:noFill/>
+        </p:spPr>
+        <p:txBody>
+          <a:bodyPr wrap="square">
+            <a:spAutoFit/>
+          </a:bodyPr>
+          <a:lstStyle/>
+          <a:p>
+            <a:r>
+              <a:rPr sz="1300" b="0">
+                <a:solidFill>
+                  <a:srgbClr val="9FB3B6"/>
+                </a:solidFill>
+                <a:latin typeface="Calibri"/>
+              </a:rPr>
+              <a:t>Team: Samuel Mburu Kairu · Vincent Odundo · Alvin Nyota · Amani Maria — Nairobi, Kenya</a:t>
+            </a:r>
           </a:p>
         </p:txBody>
       </p:sp>
